--- a/dist/초4/수학/수와연산/초4_수학_수와연산_04_세자리수÷두자리수.pptx
+++ b/dist/초4/수학/수와연산/초4_수학_수와연산_04_세자리수÷두자리수.pptx
@@ -120,13 +120,13 @@
   <p:extLst>
     <p:ext uri="{521415D9-36F7-43E2-AB2F-B90AF26B5E84}">
       <p14:sectionLst xmlns:p14="http://schemas.microsoft.com/office/powerpoint/2010/main">
-        <p14:section name="도입" id="{db088f59-0e89-a875-fb41-0ab3791cae37}">
+        <p14:section name="도입" id="{7a777fd1-880d-d39c-04a3-721480b6d7e1}">
           <p14:sldIdLst>
             <p14:sldId id="256"/>
             <p14:sldId id="257"/>
           </p14:sldIdLst>
         </p14:section>
-        <p14:section name="개념" id="{243bb390-c040-4096-debf-3481bb853c19}">
+        <p14:section name="개념" id="{c2329634-99ac-2de2-d28b-8a982194bca6}">
           <p14:sldIdLst>
             <p14:sldId id="258"/>
             <p14:sldId id="259"/>
@@ -135,34 +135,34 @@
             <p14:sldId id="264"/>
           </p14:sldIdLst>
         </p14:section>
-        <p14:section name="연습" id="{5881bfb4-5d9e-27e7-959f-a006a77d27c5}">
+        <p14:section name="연습" id="{0e71077e-9a73-b7f8-7532-351cc3c437bf}">
           <p14:sldIdLst>
             <p14:sldId id="260"/>
             <p14:sldId id="263"/>
           </p14:sldIdLst>
         </p14:section>
-        <p14:section name="개념" id="{98d36197-ca78-87cd-b9f3-0dbde92e3cba}">
+        <p14:section name="개념" id="{9f53afbe-3a7d-72c4-6238-e8e820a87537}">
           <p14:sldIdLst/>
         </p14:section>
-        <p14:section name="연습" id="{843b0b09-cf67-2eef-8520-8ff20924baf5}">
+        <p14:section name="연습" id="{8e6fcc64-6fba-3cea-358f-ce9f81ce516a}">
           <p14:sldIdLst/>
         </p14:section>
-        <p14:section name="개념" id="{cdd2d72d-6a13-7b6a-9e3c-5fd83fcb8370}">
+        <p14:section name="개념" id="{866bc862-920c-b4da-575d-2f55c95189cd}">
           <p14:sldIdLst/>
         </p14:section>
-        <p14:section name="확인" id="{09d6b56f-8488-eaf5-b76d-20d2cb644382}">
+        <p14:section name="확인" id="{1e73e528-7fb0-6fc2-a836-8c93d7f1a948}">
           <p14:sldIdLst>
             <p14:sldId id="265"/>
             <p14:sldId id="266"/>
             <p14:sldId id="267"/>
           </p14:sldIdLst>
         </p14:section>
-        <p14:section name="정리" id="{4207ded8-e060-85f1-3496-da728d139d0d}">
+        <p14:section name="정리" id="{525edae1-587b-e5d6-eeff-3058c33f32e4}">
           <p14:sldIdLst>
             <p14:sldId id="268"/>
           </p14:sldIdLst>
         </p14:section>
-        <p14:section name="보충" id="{eda93461-2cd2-0a93-4f8b-4e90d7a98292}">
+        <p14:section name="보충" id="{e19cff76-74a6-5715-3647-16ca65508ccb}">
           <p14:sldIdLst>
             <p14:sldId id="269"/>
           </p14:sldIdLst>
@@ -4281,7 +4281,7 @@
               <a:buNone/>
             </a:pPr>
             <a:r>
-              <a:rPr lang="ko-KR" altLang="en-US" sz="2400" dirty="0">
+              <a:rPr lang="en-US" altLang="ko-KR" sz="2400" dirty="0">
                 <a:solidFill>
                   <a:srgbClr val="1F2937"/>
                 </a:solidFill>
